--- a/public/fun/cards/finance/finance-47.pptx
+++ b/public/fun/cards/finance/finance-47.pptx
@@ -3085,7 +3085,7 @@
     <p:bg>
       <p:bgPr>
         <a:solidFill>
-          <a:srgbClr val="892029"/>
+          <a:srgbClr val="B66DFF"/>
         </a:solidFill>
         <a:effectLst/>
       </p:bgPr>
@@ -3099,23 +3099,44 @@
       <p:grpSpPr/>
       <p:sp>
         <p:nvSpPr>
-          <p:cNvPr id="2" name="Rectangle 1"/>
+          <p:cNvPr id="2" name="Freeform 1"/>
           <p:cNvSpPr/>
           <p:nvPr/>
         </p:nvSpPr>
         <p:spPr>
           <a:xfrm>
-            <a:off x="93600" y="93600"/>
-            <a:ext cx="3052800" cy="1612800"/>
+            <a:off x="2016000" y="0"/>
+            <a:ext cx="1224000" cy="1800000"/>
           </a:xfrm>
-          <a:prstGeom prst="rect">
+          <a:custGeom>
             <a:avLst/>
-          </a:prstGeom>
-          <a:noFill/>
-          <a:ln w="10800">
-            <a:solidFill>
-              <a:srgbClr val="F5CCCF"/>
-            </a:solidFill>
+            <a:gdLst/>
+            <a:ahLst/>
+            <a:cxnLst/>
+            <a:rect l="l" t="t" r="r" b="b"/>
+            <a:pathLst>
+              <a:path w="1224000" h="1800000">
+                <a:moveTo>
+                  <a:pt x="360000" y="0"/>
+                </a:moveTo>
+                <a:lnTo>
+                  <a:pt x="1224000" y="0"/>
+                </a:lnTo>
+                <a:lnTo>
+                  <a:pt x="1224000" y="1800000"/>
+                </a:lnTo>
+                <a:lnTo>
+                  <a:pt x="0" y="1800000"/>
+                </a:lnTo>
+                <a:close/>
+              </a:path>
+            </a:pathLst>
+          </a:custGeom>
+          <a:solidFill>
+            <a:srgbClr val="12151C"/>
+          </a:solidFill>
+          <a:ln>
+            <a:noFill/>
           </a:ln>
         </p:spPr>
         <p:txBody>
@@ -3128,23 +3149,44 @@
       </p:sp>
       <p:sp>
         <p:nvSpPr>
-          <p:cNvPr id="3" name="Rectangle 2"/>
+          <p:cNvPr id="3" name="Freeform 2"/>
           <p:cNvSpPr/>
           <p:nvPr/>
         </p:nvSpPr>
         <p:spPr>
           <a:xfrm>
-            <a:off x="144000" y="144000"/>
-            <a:ext cx="2952000" cy="1512000"/>
+            <a:off x="1864800" y="0"/>
+            <a:ext cx="460800" cy="1800000"/>
           </a:xfrm>
-          <a:prstGeom prst="rect">
+          <a:custGeom>
             <a:avLst/>
-          </a:prstGeom>
-          <a:noFill/>
-          <a:ln w="5400">
-            <a:solidFill>
-              <a:srgbClr val="9C444B"/>
-            </a:solidFill>
+            <a:gdLst/>
+            <a:ahLst/>
+            <a:cxnLst/>
+            <a:rect l="l" t="t" r="r" b="b"/>
+            <a:pathLst>
+              <a:path w="460800" h="1800000">
+                <a:moveTo>
+                  <a:pt x="360000" y="0"/>
+                </a:moveTo>
+                <a:lnTo>
+                  <a:pt x="460800" y="0"/>
+                </a:lnTo>
+                <a:lnTo>
+                  <a:pt x="100800" y="1800000"/>
+                </a:lnTo>
+                <a:lnTo>
+                  <a:pt x="0" y="1800000"/>
+                </a:lnTo>
+                <a:close/>
+              </a:path>
+            </a:pathLst>
+          </a:custGeom>
+          <a:solidFill>
+            <a:srgbClr val="C58AFF"/>
+          </a:solidFill>
+          <a:ln>
+            <a:noFill/>
           </a:ln>
         </p:spPr>
         <p:txBody>
@@ -3163,8 +3205,8 @@
         </p:nvSpPr>
         <p:spPr>
           <a:xfrm>
-            <a:off x="360000" y="280800"/>
-            <a:ext cx="2520000" cy="100800"/>
+            <a:off x="252000" y="223200"/>
+            <a:ext cx="1440000" cy="133351"/>
           </a:xfrm>
           <a:prstGeom prst="rect">
             <a:avLst/>
@@ -3177,15 +3219,15 @@
           </a:bodyPr>
           <a:lstStyle/>
           <a:p>
-            <a:pPr algn="ctr">
+            <a:pPr algn="l">
               <a:lnSpc>
                 <a:spcPts val="1015"/>
               </a:lnSpc>
             </a:pPr>
             <a:r>
-              <a:rPr sz="700" b="1" spc="400">
+              <a:rPr sz="700" b="1" spc="200">
                 <a:solidFill>
-                  <a:srgbClr val="D6B1B4"/>
+                  <a:srgbClr val="36284E"/>
                 </a:solidFill>
                 <a:latin typeface="맑은 고딕"/>
                 <a:ea typeface="맑은 고딕"/>
@@ -3203,8 +3245,8 @@
         </p:nvSpPr>
         <p:spPr>
           <a:xfrm>
-            <a:off x="360000" y="468000"/>
-            <a:ext cx="2520000" cy="313692"/>
+            <a:off x="252000" y="540000"/>
+            <a:ext cx="1584000" cy="360000"/>
           </a:xfrm>
           <a:prstGeom prst="rect">
             <a:avLst/>
@@ -3217,15 +3259,15 @@
           </a:bodyPr>
           <a:lstStyle/>
           <a:p>
-            <a:pPr algn="ctr">
+            <a:pPr algn="l">
               <a:lnSpc>
-                <a:spcPts val="2755"/>
+                <a:spcPts val="3190"/>
               </a:lnSpc>
             </a:pPr>
             <a:r>
-              <a:rPr sz="1900" b="1" spc="50">
+              <a:rPr sz="2200" b="1">
                 <a:solidFill>
-                  <a:srgbClr val="FFFFFF"/>
+                  <a:srgbClr val="12151C"/>
                 </a:solidFill>
                 <a:latin typeface="맑은 고딕"/>
                 <a:ea typeface="맑은 고딕"/>
@@ -3243,8 +3285,8 @@
         </p:nvSpPr>
         <p:spPr>
           <a:xfrm>
-            <a:off x="360000" y="784800"/>
-            <a:ext cx="2520000" cy="122400"/>
+            <a:off x="252000" y="943200"/>
+            <a:ext cx="1584000" cy="171451"/>
           </a:xfrm>
           <a:prstGeom prst="rect">
             <a:avLst/>
@@ -3257,15 +3299,15 @@
           </a:bodyPr>
           <a:lstStyle/>
           <a:p>
-            <a:pPr algn="ctr">
+            <a:pPr algn="l">
               <a:lnSpc>
-                <a:spcPts val="1232"/>
+                <a:spcPts val="1305"/>
               </a:lnSpc>
             </a:pPr>
             <a:r>
-              <a:rPr sz="850" b="1">
+              <a:rPr sz="900" b="0">
                 <a:solidFill>
-                  <a:srgbClr val="F5CCCF"/>
+                  <a:srgbClr val="36284E"/>
                 </a:solidFill>
                 <a:latin typeface="맑은 고딕"/>
                 <a:ea typeface="맑은 고딕"/>
@@ -3283,14 +3325,14 @@
         </p:nvSpPr>
         <p:spPr>
           <a:xfrm>
-            <a:off x="1530000" y="993600"/>
-            <a:ext cx="180000" cy="10800"/>
+            <a:off x="252000" y="1195200"/>
+            <a:ext cx="144000" cy="18000"/>
           </a:xfrm>
           <a:prstGeom prst="rect">
             <a:avLst/>
           </a:prstGeom>
           <a:solidFill>
-            <a:srgbClr val="F5CCCF"/>
+            <a:srgbClr val="12151C"/>
           </a:solidFill>
           <a:ln>
             <a:noFill/>
@@ -3312,8 +3354,8 @@
         </p:nvSpPr>
         <p:spPr>
           <a:xfrm>
-            <a:off x="360000" y="1087200"/>
-            <a:ext cx="2520000" cy="108000"/>
+            <a:off x="252000" y="1328400"/>
+            <a:ext cx="331200" cy="99061"/>
           </a:xfrm>
           <a:prstGeom prst="rect">
             <a:avLst/>
@@ -3326,20 +3368,20 @@
           </a:bodyPr>
           <a:lstStyle/>
           <a:p>
-            <a:pPr algn="ctr">
+            <a:pPr algn="l">
               <a:lnSpc>
-                <a:spcPts val="1087"/>
+                <a:spcPts val="754"/>
               </a:lnSpc>
             </a:pPr>
             <a:r>
-              <a:rPr sz="750" b="0">
+              <a:rPr sz="520" b="1" spc="120">
                 <a:solidFill>
-                  <a:srgbClr val="FFFFFF"/>
+                  <a:srgbClr val="36284E"/>
                 </a:solidFill>
                 <a:latin typeface="맑은 고딕"/>
                 <a:ea typeface="맑은 고딕"/>
               </a:rPr>
-              <a:t>010-1234-5678</a:t>
+              <a:t>TEL</a:t>
             </a:r>
           </a:p>
         </p:txBody>
@@ -3352,8 +3394,8 @@
         </p:nvSpPr>
         <p:spPr>
           <a:xfrm>
-            <a:off x="360000" y="1209600"/>
-            <a:ext cx="2520000" cy="108000"/>
+            <a:off x="583200" y="1317600"/>
+            <a:ext cx="1188000" cy="125731"/>
           </a:xfrm>
           <a:prstGeom prst="rect">
             <a:avLst/>
@@ -3366,20 +3408,20 @@
           </a:bodyPr>
           <a:lstStyle/>
           <a:p>
-            <a:pPr algn="ctr">
+            <a:pPr algn="l">
               <a:lnSpc>
-                <a:spcPts val="1087"/>
+                <a:spcPts val="956"/>
               </a:lnSpc>
             </a:pPr>
             <a:r>
-              <a:rPr sz="750" b="0">
+              <a:rPr sz="660" b="0">
                 <a:solidFill>
-                  <a:srgbClr val="FFFFFF"/>
+                  <a:srgbClr val="12151C"/>
                 </a:solidFill>
                 <a:latin typeface="맑은 고딕"/>
                 <a:ea typeface="맑은 고딕"/>
               </a:rPr>
-              <a:t>name@example.com</a:t>
+              <a:t>010-1234-5678</a:t>
             </a:r>
           </a:p>
         </p:txBody>
@@ -3392,8 +3434,8 @@
         </p:nvSpPr>
         <p:spPr>
           <a:xfrm>
-            <a:off x="360000" y="1332000"/>
-            <a:ext cx="2520000" cy="108000"/>
+            <a:off x="252000" y="1458000"/>
+            <a:ext cx="331200" cy="99061"/>
           </a:xfrm>
           <a:prstGeom prst="rect">
             <a:avLst/>
@@ -3406,15 +3448,135 @@
           </a:bodyPr>
           <a:lstStyle/>
           <a:p>
-            <a:pPr algn="ctr">
+            <a:pPr algn="l">
               <a:lnSpc>
-                <a:spcPts val="1015"/>
+                <a:spcPts val="754"/>
               </a:lnSpc>
             </a:pPr>
             <a:r>
-              <a:rPr sz="700" b="0">
+              <a:rPr sz="520" b="1" spc="120">
                 <a:solidFill>
-                  <a:srgbClr val="D6B1B4"/>
+                  <a:srgbClr val="36284E"/>
+                </a:solidFill>
+                <a:latin typeface="맑은 고딕"/>
+                <a:ea typeface="맑은 고딕"/>
+              </a:rPr>
+              <a:t>MAIL</a:t>
+            </a:r>
+          </a:p>
+        </p:txBody>
+      </p:sp>
+      <p:sp>
+        <p:nvSpPr>
+          <p:cNvPr id="11" name="텍스트"/>
+          <p:cNvSpPr txBox="1"/>
+          <p:nvPr/>
+        </p:nvSpPr>
+        <p:spPr>
+          <a:xfrm>
+            <a:off x="583200" y="1447200"/>
+            <a:ext cx="1188000" cy="125731"/>
+          </a:xfrm>
+          <a:prstGeom prst="rect">
+            <a:avLst/>
+          </a:prstGeom>
+          <a:noFill/>
+        </p:spPr>
+        <p:txBody>
+          <a:bodyPr wrap="square" lIns="0" rIns="0" tIns="0" bIns="0" anchor="t">
+            <a:spAutoFit/>
+          </a:bodyPr>
+          <a:lstStyle/>
+          <a:p>
+            <a:pPr algn="l">
+              <a:lnSpc>
+                <a:spcPts val="956"/>
+              </a:lnSpc>
+            </a:pPr>
+            <a:r>
+              <a:rPr sz="660" b="0">
+                <a:solidFill>
+                  <a:srgbClr val="12151C"/>
+                </a:solidFill>
+                <a:latin typeface="맑은 고딕"/>
+                <a:ea typeface="맑은 고딕"/>
+              </a:rPr>
+              <a:t>name@example.com</a:t>
+            </a:r>
+          </a:p>
+        </p:txBody>
+      </p:sp>
+      <p:sp>
+        <p:nvSpPr>
+          <p:cNvPr id="12" name="텍스트"/>
+          <p:cNvSpPr txBox="1"/>
+          <p:nvPr/>
+        </p:nvSpPr>
+        <p:spPr>
+          <a:xfrm>
+            <a:off x="252000" y="1587600"/>
+            <a:ext cx="331200" cy="99061"/>
+          </a:xfrm>
+          <a:prstGeom prst="rect">
+            <a:avLst/>
+          </a:prstGeom>
+          <a:noFill/>
+        </p:spPr>
+        <p:txBody>
+          <a:bodyPr wrap="square" lIns="0" rIns="0" tIns="0" bIns="0" anchor="t">
+            <a:spAutoFit/>
+          </a:bodyPr>
+          <a:lstStyle/>
+          <a:p>
+            <a:pPr algn="l">
+              <a:lnSpc>
+                <a:spcPts val="754"/>
+              </a:lnSpc>
+            </a:pPr>
+            <a:r>
+              <a:rPr sz="520" b="1" spc="120">
+                <a:solidFill>
+                  <a:srgbClr val="36284E"/>
+                </a:solidFill>
+                <a:latin typeface="맑은 고딕"/>
+                <a:ea typeface="맑은 고딕"/>
+              </a:rPr>
+              <a:t>ADDR</a:t>
+            </a:r>
+          </a:p>
+        </p:txBody>
+      </p:sp>
+      <p:sp>
+        <p:nvSpPr>
+          <p:cNvPr id="13" name="텍스트"/>
+          <p:cNvSpPr txBox="1"/>
+          <p:nvPr/>
+        </p:nvSpPr>
+        <p:spPr>
+          <a:xfrm>
+            <a:off x="583200" y="1576800"/>
+            <a:ext cx="1188000" cy="125731"/>
+          </a:xfrm>
+          <a:prstGeom prst="rect">
+            <a:avLst/>
+          </a:prstGeom>
+          <a:noFill/>
+        </p:spPr>
+        <p:txBody>
+          <a:bodyPr wrap="square" lIns="0" rIns="0" tIns="0" bIns="0" anchor="t">
+            <a:spAutoFit/>
+          </a:bodyPr>
+          <a:lstStyle/>
+          <a:p>
+            <a:pPr algn="l">
+              <a:lnSpc>
+                <a:spcPts val="956"/>
+              </a:lnSpc>
+            </a:pPr>
+            <a:r>
+              <a:rPr sz="660" b="0">
+                <a:solidFill>
+                  <a:srgbClr val="12151C"/>
                 </a:solidFill>
                 <a:latin typeface="맑은 고딕"/>
                 <a:ea typeface="맑은 고딕"/>
@@ -3424,98 +3586,6 @@
           </a:p>
         </p:txBody>
       </p:sp>
-      <p:sp>
-        <p:nvSpPr>
-          <p:cNvPr id="11" name="Oval 10"/>
-          <p:cNvSpPr/>
-          <p:nvPr/>
-        </p:nvSpPr>
-        <p:spPr>
-          <a:xfrm>
-            <a:off x="1559808" y="1512432"/>
-            <a:ext cx="54720" cy="54720"/>
-          </a:xfrm>
-          <a:prstGeom prst="ellipse">
-            <a:avLst/>
-          </a:prstGeom>
-          <a:noFill/>
-          <a:ln w="12312">
-            <a:solidFill>
-              <a:srgbClr val="F5CCCF"/>
-            </a:solidFill>
-          </a:ln>
-        </p:spPr>
-        <p:txBody>
-          <a:bodyPr rtlCol="0" anchor="ctr"/>
-          <a:lstStyle/>
-          <a:p>
-            <a:pPr algn="ctr"/>
-          </a:p>
-        </p:txBody>
-      </p:sp>
-      <p:cxnSp>
-        <p:nvCxnSpPr>
-          <p:cNvPr id="12" name="Connector 11"/>
-          <p:cNvCxnSpPr/>
-          <p:nvPr/>
-        </p:nvCxnSpPr>
-        <p:spPr>
-          <a:xfrm>
-            <a:off x="1611792" y="1539792"/>
-            <a:ext cx="68400" cy="0"/>
-          </a:xfrm>
-          <a:prstGeom prst="line">
-            <a:avLst/>
-          </a:prstGeom>
-          <a:ln w="12312">
-            <a:solidFill>
-              <a:srgbClr val="F5CCCF"/>
-            </a:solidFill>
-          </a:ln>
-        </p:spPr>
-      </p:cxnSp>
-      <p:cxnSp>
-        <p:nvCxnSpPr>
-          <p:cNvPr id="13" name="Connector 12"/>
-          <p:cNvCxnSpPr/>
-          <p:nvPr/>
-        </p:nvCxnSpPr>
-        <p:spPr>
-          <a:xfrm>
-            <a:off x="1661040" y="1539792"/>
-            <a:ext cx="0" cy="24624"/>
-          </a:xfrm>
-          <a:prstGeom prst="line">
-            <a:avLst/>
-          </a:prstGeom>
-          <a:ln w="10944">
-            <a:solidFill>
-              <a:srgbClr val="9C444B"/>
-            </a:solidFill>
-          </a:ln>
-        </p:spPr>
-      </p:cxnSp>
-      <p:cxnSp>
-        <p:nvCxnSpPr>
-          <p:cNvPr id="14" name="Connector 13"/>
-          <p:cNvCxnSpPr/>
-          <p:nvPr/>
-        </p:nvCxnSpPr>
-        <p:spPr>
-          <a:xfrm>
-            <a:off x="1680192" y="1539792"/>
-            <a:ext cx="0" cy="30096"/>
-          </a:xfrm>
-          <a:prstGeom prst="line">
-            <a:avLst/>
-          </a:prstGeom>
-          <a:ln w="10944">
-            <a:solidFill>
-              <a:srgbClr val="9C444B"/>
-            </a:solidFill>
-          </a:ln>
-        </p:spPr>
-      </p:cxnSp>
     </p:spTree>
   </p:cSld>
   <p:clrMapOvr>
@@ -3530,7 +3600,7 @@
     <p:bg>
       <p:bgPr>
         <a:solidFill>
-          <a:srgbClr val="431920"/>
+          <a:srgbClr val="F3F4F6"/>
         </a:solidFill>
         <a:effectLst/>
       </p:bgPr>
@@ -3544,22 +3614,51 @@
       <p:grpSpPr/>
       <p:sp>
         <p:nvSpPr>
-          <p:cNvPr id="2" name="Oval 1"/>
+          <p:cNvPr id="2" name="Rectangle 1"/>
           <p:cNvSpPr/>
           <p:nvPr/>
         </p:nvSpPr>
         <p:spPr>
           <a:xfrm>
-            <a:off x="923040" y="488160"/>
-            <a:ext cx="633600" cy="633600"/>
+            <a:off x="2088000" y="0"/>
+            <a:ext cx="1152000" cy="1800000"/>
+          </a:xfrm>
+          <a:prstGeom prst="rect">
+            <a:avLst/>
+          </a:prstGeom>
+          <a:solidFill>
+            <a:srgbClr val="B66DFF"/>
+          </a:solidFill>
+          <a:ln>
+            <a:noFill/>
+          </a:ln>
+        </p:spPr>
+        <p:txBody>
+          <a:bodyPr rtlCol="0" anchor="ctr"/>
+          <a:lstStyle/>
+          <a:p>
+            <a:pPr algn="ctr"/>
+          </a:p>
+        </p:txBody>
+      </p:sp>
+      <p:sp>
+        <p:nvSpPr>
+          <p:cNvPr id="3" name="Oval 2"/>
+          <p:cNvSpPr/>
+          <p:nvPr/>
+        </p:nvSpPr>
+        <p:spPr>
+          <a:xfrm>
+            <a:off x="2397600" y="633600"/>
+            <a:ext cx="532800" cy="532800"/>
           </a:xfrm>
           <a:prstGeom prst="ellipse">
             <a:avLst/>
           </a:prstGeom>
           <a:noFill/>
-          <a:ln w="142560">
+          <a:ln w="10800">
             <a:solidFill>
-              <a:srgbClr val="AD6D78"/>
+              <a:srgbClr val="12151C"/>
             </a:solidFill>
           </a:ln>
         </p:spPr>
@@ -3571,110 +3670,16 @@
           </a:p>
         </p:txBody>
       </p:sp>
-      <p:cxnSp>
-        <p:nvCxnSpPr>
-          <p:cNvPr id="3" name="Connector 2"/>
-          <p:cNvCxnSpPr/>
+      <p:sp>
+        <p:nvSpPr>
+          <p:cNvPr id="4" name="텍스트"/>
+          <p:cNvSpPr txBox="1"/>
           <p:nvPr/>
-        </p:nvCxnSpPr>
+        </p:nvSpPr>
         <p:spPr>
           <a:xfrm>
-            <a:off x="1524960" y="804960"/>
-            <a:ext cx="792000" cy="0"/>
-          </a:xfrm>
-          <a:prstGeom prst="line">
-            <a:avLst/>
-          </a:prstGeom>
-          <a:ln w="142560">
-            <a:solidFill>
-              <a:srgbClr val="AD6D78"/>
-            </a:solidFill>
-          </a:ln>
-        </p:spPr>
-      </p:cxnSp>
-      <p:cxnSp>
-        <p:nvCxnSpPr>
-          <p:cNvPr id="4" name="Connector 3"/>
-          <p:cNvCxnSpPr/>
-          <p:nvPr/>
-        </p:nvCxnSpPr>
-        <p:spPr>
-          <a:xfrm>
-            <a:off x="2095200" y="804960"/>
-            <a:ext cx="0" cy="285120"/>
-          </a:xfrm>
-          <a:prstGeom prst="line">
-            <a:avLst/>
-          </a:prstGeom>
-          <a:ln w="126720">
-            <a:solidFill>
-              <a:srgbClr val="613E44"/>
-            </a:solidFill>
-          </a:ln>
-        </p:spPr>
-      </p:cxnSp>
-      <p:cxnSp>
-        <p:nvCxnSpPr>
-          <p:cNvPr id="5" name="Connector 4"/>
-          <p:cNvCxnSpPr/>
-          <p:nvPr/>
-        </p:nvCxnSpPr>
-        <p:spPr>
-          <a:xfrm>
-            <a:off x="2316960" y="804960"/>
-            <a:ext cx="0" cy="348480"/>
-          </a:xfrm>
-          <a:prstGeom prst="line">
-            <a:avLst/>
-          </a:prstGeom>
-          <a:ln w="126720">
-            <a:solidFill>
-              <a:srgbClr val="613E44"/>
-            </a:solidFill>
-          </a:ln>
-        </p:spPr>
-      </p:cxnSp>
-      <p:sp>
-        <p:nvSpPr>
-          <p:cNvPr id="6" name="Rectangle 5"/>
-          <p:cNvSpPr/>
-          <p:nvPr/>
-        </p:nvSpPr>
-        <p:spPr>
-          <a:xfrm>
-            <a:off x="0" y="0"/>
-            <a:ext cx="3240000" cy="1800000"/>
-          </a:xfrm>
-          <a:prstGeom prst="rect">
-            <a:avLst/>
-          </a:prstGeom>
-          <a:solidFill>
-            <a:srgbClr val="431920">
-              <a:alpha val="90000"/>
-            </a:srgbClr>
-          </a:solidFill>
-          <a:ln>
-            <a:noFill/>
-          </a:ln>
-        </p:spPr>
-        <p:txBody>
-          <a:bodyPr rtlCol="0" anchor="ctr"/>
-          <a:lstStyle/>
-          <a:p>
-            <a:pPr algn="ctr"/>
-          </a:p>
-        </p:txBody>
-      </p:sp>
-      <p:sp>
-        <p:nvSpPr>
-          <p:cNvPr id="7" name="텍스트"/>
-          <p:cNvSpPr txBox="1"/>
-          <p:nvPr/>
-        </p:nvSpPr>
-        <p:spPr>
-          <a:xfrm>
-            <a:off x="396000" y="612000"/>
-            <a:ext cx="2448000" cy="432000"/>
+            <a:off x="2304000" y="684000"/>
+            <a:ext cx="720000" cy="432000"/>
           </a:xfrm>
           <a:prstGeom prst="rect">
             <a:avLst/>
@@ -3689,61 +3694,32 @@
           <a:p>
             <a:pPr algn="ctr">
               <a:lnSpc>
-                <a:spcPts val="1739"/>
+                <a:spcPts val="4350"/>
               </a:lnSpc>
             </a:pPr>
             <a:r>
-              <a:rPr sz="1200" b="1">
+              <a:rPr sz="3000" b="1">
                 <a:solidFill>
-                  <a:srgbClr val="FFFFFF"/>
+                  <a:srgbClr val="12151C"/>
                 </a:solidFill>
-                <a:latin typeface="바탕"/>
-                <a:ea typeface="바탕"/>
+                <a:latin typeface="맑은 고딕"/>
+                <a:ea typeface="맑은 고딕"/>
               </a:rPr>
-              <a:t>어려운 용어는 쉽게 풀어서</a:t>
-            </a:r>
-          </a:p>
-        </p:txBody>
-      </p:sp>
-      <p:sp>
-        <p:nvSpPr>
-          <p:cNvPr id="8" name="Rectangle 7"/>
-          <p:cNvSpPr/>
+              <a:t>회</a:t>
+            </a:r>
+          </a:p>
+        </p:txBody>
+      </p:sp>
+      <p:sp>
+        <p:nvSpPr>
+          <p:cNvPr id="5" name="텍스트"/>
+          <p:cNvSpPr txBox="1"/>
           <p:nvPr/>
         </p:nvSpPr>
         <p:spPr>
           <a:xfrm>
-            <a:off x="1512000" y="1173600"/>
-            <a:ext cx="216000" cy="10800"/>
-          </a:xfrm>
-          <a:prstGeom prst="rect">
-            <a:avLst/>
-          </a:prstGeom>
-          <a:solidFill>
-            <a:srgbClr val="AD6D78"/>
-          </a:solidFill>
-          <a:ln>
-            <a:noFill/>
-          </a:ln>
-        </p:spPr>
-        <p:txBody>
-          <a:bodyPr rtlCol="0" anchor="ctr"/>
-          <a:lstStyle/>
-          <a:p>
-            <a:pPr algn="ctr"/>
-          </a:p>
-        </p:txBody>
-      </p:sp>
-      <p:sp>
-        <p:nvSpPr>
-          <p:cNvPr id="9" name="텍스트"/>
-          <p:cNvSpPr txBox="1"/>
-          <p:nvPr/>
-        </p:nvSpPr>
-        <p:spPr>
-          <a:xfrm>
-            <a:off x="360000" y="1288800"/>
-            <a:ext cx="2520000" cy="108000"/>
+            <a:off x="252000" y="540000"/>
+            <a:ext cx="1620000" cy="720000"/>
           </a:xfrm>
           <a:prstGeom prst="rect">
             <a:avLst/>
@@ -3756,15 +3732,72 @@
           </a:bodyPr>
           <a:lstStyle/>
           <a:p>
-            <a:pPr algn="ctr">
+            <a:pPr algn="l">
               <a:lnSpc>
-                <a:spcPts val="1087"/>
+                <a:spcPts val="1739"/>
               </a:lnSpc>
             </a:pPr>
             <a:r>
-              <a:rPr sz="750" b="1" spc="300">
+              <a:rPr sz="1200" b="1">
                 <a:solidFill>
-                  <a:srgbClr val="BDAEB1"/>
+                  <a:srgbClr val="12151C"/>
+                </a:solidFill>
+                <a:latin typeface="맑은 고딕"/>
+                <a:ea typeface="맑은 고딕"/>
+              </a:rPr>
+              <a:t>어려운 용어는</a:t>
+            </a:r>
+          </a:p>
+          <a:p>
+            <a:pPr algn="l">
+              <a:lnSpc>
+                <a:spcPts val="1739"/>
+              </a:lnSpc>
+            </a:pPr>
+            <a:r>
+              <a:rPr sz="1200" b="1">
+                <a:solidFill>
+                  <a:srgbClr val="12151C"/>
+                </a:solidFill>
+                <a:latin typeface="맑은 고딕"/>
+                <a:ea typeface="맑은 고딕"/>
+              </a:rPr>
+              <a:t>쉽게 풀어서</a:t>
+            </a:r>
+          </a:p>
+        </p:txBody>
+      </p:sp>
+      <p:sp>
+        <p:nvSpPr>
+          <p:cNvPr id="6" name="텍스트"/>
+          <p:cNvSpPr txBox="1"/>
+          <p:nvPr/>
+        </p:nvSpPr>
+        <p:spPr>
+          <a:xfrm>
+            <a:off x="252000" y="1512000"/>
+            <a:ext cx="1584000" cy="123826"/>
+          </a:xfrm>
+          <a:prstGeom prst="rect">
+            <a:avLst/>
+          </a:prstGeom>
+          <a:noFill/>
+        </p:spPr>
+        <p:txBody>
+          <a:bodyPr wrap="square" lIns="0" rIns="0" tIns="0" bIns="0" anchor="t">
+            <a:spAutoFit/>
+          </a:bodyPr>
+          <a:lstStyle/>
+          <a:p>
+            <a:pPr algn="l">
+              <a:lnSpc>
+                <a:spcPts val="942"/>
+              </a:lnSpc>
+            </a:pPr>
+            <a:r>
+              <a:rPr sz="650" b="1" spc="200">
+                <a:solidFill>
+                  <a:srgbClr val="6B7280"/>
                 </a:solidFill>
                 <a:latin typeface="맑은 고딕"/>
                 <a:ea typeface="맑은 고딕"/>

--- a/public/fun/cards/finance/finance-47.pptx
+++ b/public/fun/cards/finance/finance-47.pptx
@@ -3105,8 +3105,8 @@
         </p:nvSpPr>
         <p:spPr>
           <a:xfrm>
-            <a:off x="2016000" y="0"/>
-            <a:ext cx="1224000" cy="1800000"/>
+            <a:off x="2124000" y="0"/>
+            <a:ext cx="1116000" cy="1800000"/>
           </a:xfrm>
           <a:custGeom>
             <a:avLst/>
@@ -3115,15 +3115,15 @@
             <a:cxnLst/>
             <a:rect l="l" t="t" r="r" b="b"/>
             <a:pathLst>
-              <a:path w="1224000" h="1800000">
+              <a:path w="1116000" h="1800000">
                 <a:moveTo>
                   <a:pt x="360000" y="0"/>
                 </a:moveTo>
                 <a:lnTo>
-                  <a:pt x="1224000" y="0"/>
+                  <a:pt x="1116000" y="0"/>
                 </a:lnTo>
                 <a:lnTo>
-                  <a:pt x="1224000" y="1800000"/>
+                  <a:pt x="1116000" y="1800000"/>
                 </a:lnTo>
                 <a:lnTo>
                   <a:pt x="0" y="1800000"/>
@@ -3147,66 +3147,79 @@
           </a:p>
         </p:txBody>
       </p:sp>
-      <p:sp>
-        <p:nvSpPr>
-          <p:cNvPr id="3" name="Freeform 2"/>
-          <p:cNvSpPr/>
+      <p:cxnSp>
+        <p:nvCxnSpPr>
+          <p:cNvPr id="3" name="Connector 2"/>
+          <p:cNvCxnSpPr/>
+          <p:nvPr/>
+        </p:nvCxnSpPr>
+        <p:spPr>
+          <a:xfrm flipH="1">
+            <a:off x="2044800" y="0"/>
+            <a:ext cx="360000" cy="1800000"/>
+          </a:xfrm>
+          <a:prstGeom prst="line">
+            <a:avLst/>
+          </a:prstGeom>
+          <a:ln w="3600">
+            <a:solidFill>
+              <a:srgbClr val="36284E"/>
+            </a:solidFill>
+          </a:ln>
+        </p:spPr>
+      </p:cxnSp>
+      <p:cxnSp>
+        <p:nvCxnSpPr>
+          <p:cNvPr id="4" name="Connector 3"/>
+          <p:cNvCxnSpPr/>
+          <p:nvPr/>
+        </p:nvCxnSpPr>
+        <p:spPr>
+          <a:xfrm flipH="1">
+            <a:off x="1965600" y="0"/>
+            <a:ext cx="360000" cy="1800000"/>
+          </a:xfrm>
+          <a:prstGeom prst="line">
+            <a:avLst/>
+          </a:prstGeom>
+          <a:ln w="3600">
+            <a:solidFill>
+              <a:srgbClr val="36284E"/>
+            </a:solidFill>
+          </a:ln>
+        </p:spPr>
+      </p:cxnSp>
+      <p:cxnSp>
+        <p:nvCxnSpPr>
+          <p:cNvPr id="5" name="Connector 4"/>
+          <p:cNvCxnSpPr/>
+          <p:nvPr/>
+        </p:nvCxnSpPr>
+        <p:spPr>
+          <a:xfrm flipH="1">
+            <a:off x="1886400" y="0"/>
+            <a:ext cx="360000" cy="1800000"/>
+          </a:xfrm>
+          <a:prstGeom prst="line">
+            <a:avLst/>
+          </a:prstGeom>
+          <a:ln w="3600">
+            <a:solidFill>
+              <a:srgbClr val="36284E"/>
+            </a:solidFill>
+          </a:ln>
+        </p:spPr>
+      </p:cxnSp>
+      <p:sp>
+        <p:nvSpPr>
+          <p:cNvPr id="6" name="텍스트"/>
+          <p:cNvSpPr txBox="1"/>
           <p:nvPr/>
         </p:nvSpPr>
         <p:spPr>
           <a:xfrm>
-            <a:off x="1864800" y="0"/>
-            <a:ext cx="460800" cy="1800000"/>
-          </a:xfrm>
-          <a:custGeom>
-            <a:avLst/>
-            <a:gdLst/>
-            <a:ahLst/>
-            <a:cxnLst/>
-            <a:rect l="l" t="t" r="r" b="b"/>
-            <a:pathLst>
-              <a:path w="460800" h="1800000">
-                <a:moveTo>
-                  <a:pt x="360000" y="0"/>
-                </a:moveTo>
-                <a:lnTo>
-                  <a:pt x="460800" y="0"/>
-                </a:lnTo>
-                <a:lnTo>
-                  <a:pt x="100800" y="1800000"/>
-                </a:lnTo>
-                <a:lnTo>
-                  <a:pt x="0" y="1800000"/>
-                </a:lnTo>
-                <a:close/>
-              </a:path>
-            </a:pathLst>
-          </a:custGeom>
-          <a:solidFill>
-            <a:srgbClr val="C58AFF"/>
-          </a:solidFill>
-          <a:ln>
-            <a:noFill/>
-          </a:ln>
-        </p:spPr>
-        <p:txBody>
-          <a:bodyPr rtlCol="0" anchor="ctr"/>
-          <a:lstStyle/>
-          <a:p>
-            <a:pPr algn="ctr"/>
-          </a:p>
-        </p:txBody>
-      </p:sp>
-      <p:sp>
-        <p:nvSpPr>
-          <p:cNvPr id="4" name="텍스트"/>
-          <p:cNvSpPr txBox="1"/>
-          <p:nvPr/>
-        </p:nvSpPr>
-        <p:spPr>
-          <a:xfrm>
-            <a:off x="252000" y="223200"/>
-            <a:ext cx="1440000" cy="133351"/>
+            <a:off x="252000" y="252000"/>
+            <a:ext cx="1440000" cy="123826"/>
           </a:xfrm>
           <a:prstGeom prst="rect">
             <a:avLst/>
@@ -3221,11 +3234,11 @@
           <a:p>
             <a:pPr algn="l">
               <a:lnSpc>
-                <a:spcPts val="1015"/>
+                <a:spcPts val="942"/>
               </a:lnSpc>
             </a:pPr>
             <a:r>
-              <a:rPr sz="700" b="1" spc="200">
+              <a:rPr sz="650" b="1" spc="220">
                 <a:solidFill>
                   <a:srgbClr val="36284E"/>
                 </a:solidFill>
@@ -3237,16 +3250,37 @@
           </a:p>
         </p:txBody>
       </p:sp>
-      <p:sp>
-        <p:nvSpPr>
-          <p:cNvPr id="5" name="텍스트"/>
+      <p:cxnSp>
+        <p:nvCxnSpPr>
+          <p:cNvPr id="7" name="Connector 6"/>
+          <p:cNvCxnSpPr/>
+          <p:nvPr/>
+        </p:nvCxnSpPr>
+        <p:spPr>
+          <a:xfrm>
+            <a:off x="252000" y="374400"/>
+            <a:ext cx="1260000" cy="0"/>
+          </a:xfrm>
+          <a:prstGeom prst="line">
+            <a:avLst/>
+          </a:prstGeom>
+          <a:ln w="3600">
+            <a:solidFill>
+              <a:srgbClr val="744AA4"/>
+            </a:solidFill>
+          </a:ln>
+        </p:spPr>
+      </p:cxnSp>
+      <p:sp>
+        <p:nvSpPr>
+          <p:cNvPr id="8" name="텍스트"/>
           <p:cNvSpPr txBox="1"/>
           <p:nvPr/>
         </p:nvSpPr>
         <p:spPr>
           <a:xfrm>
-            <a:off x="252000" y="540000"/>
-            <a:ext cx="1584000" cy="360000"/>
+            <a:off x="252000" y="633600"/>
+            <a:ext cx="1800000" cy="237600"/>
           </a:xfrm>
           <a:prstGeom prst="rect">
             <a:avLst/>
@@ -3261,11 +3295,11 @@
           <a:p>
             <a:pPr algn="l">
               <a:lnSpc>
-                <a:spcPts val="3190"/>
+                <a:spcPts val="1957"/>
               </a:lnSpc>
             </a:pPr>
             <a:r>
-              <a:rPr sz="2200" b="1">
+              <a:rPr sz="1350" b="1" spc="120">
                 <a:solidFill>
                   <a:srgbClr val="12151C"/>
                 </a:solidFill>
@@ -3279,14 +3313,14 @@
       </p:sp>
       <p:sp>
         <p:nvSpPr>
-          <p:cNvPr id="6" name="텍스트"/>
+          <p:cNvPr id="9" name="텍스트"/>
           <p:cNvSpPr txBox="1"/>
           <p:nvPr/>
         </p:nvSpPr>
         <p:spPr>
           <a:xfrm>
-            <a:off x="252000" y="943200"/>
-            <a:ext cx="1584000" cy="171451"/>
+            <a:off x="252000" y="885600"/>
+            <a:ext cx="1800000" cy="133351"/>
           </a:xfrm>
           <a:prstGeom prst="rect">
             <a:avLst/>
@@ -3301,11 +3335,11 @@
           <a:p>
             <a:pPr algn="l">
               <a:lnSpc>
-                <a:spcPts val="1305"/>
+                <a:spcPts val="1015"/>
               </a:lnSpc>
             </a:pPr>
             <a:r>
-              <a:rPr sz="900" b="0">
+              <a:rPr sz="700" b="0" spc="60">
                 <a:solidFill>
                   <a:srgbClr val="36284E"/>
                 </a:solidFill>
@@ -3319,14 +3353,14 @@
       </p:sp>
       <p:sp>
         <p:nvSpPr>
-          <p:cNvPr id="7" name="Rectangle 6"/>
+          <p:cNvPr id="10" name="Rectangle 9"/>
           <p:cNvSpPr/>
           <p:nvPr/>
         </p:nvSpPr>
         <p:spPr>
           <a:xfrm>
-            <a:off x="252000" y="1195200"/>
-            <a:ext cx="144000" cy="18000"/>
+            <a:off x="252000" y="1044000"/>
+            <a:ext cx="129600" cy="14400"/>
           </a:xfrm>
           <a:prstGeom prst="rect">
             <a:avLst/>
@@ -3348,14 +3382,14 @@
       </p:sp>
       <p:sp>
         <p:nvSpPr>
-          <p:cNvPr id="8" name="텍스트"/>
+          <p:cNvPr id="11" name="텍스트"/>
           <p:cNvSpPr txBox="1"/>
           <p:nvPr/>
         </p:nvSpPr>
         <p:spPr>
           <a:xfrm>
-            <a:off x="252000" y="1328400"/>
-            <a:ext cx="331200" cy="99061"/>
+            <a:off x="252000" y="1184400"/>
+            <a:ext cx="324000" cy="91441"/>
           </a:xfrm>
           <a:prstGeom prst="rect">
             <a:avLst/>
@@ -3370,11 +3404,11 @@
           <a:p>
             <a:pPr algn="l">
               <a:lnSpc>
-                <a:spcPts val="754"/>
+                <a:spcPts val="696"/>
               </a:lnSpc>
             </a:pPr>
             <a:r>
-              <a:rPr sz="520" b="1" spc="120">
+              <a:rPr sz="480" b="1" spc="140">
                 <a:solidFill>
                   <a:srgbClr val="36284E"/>
                 </a:solidFill>
@@ -3388,14 +3422,14 @@
       </p:sp>
       <p:sp>
         <p:nvSpPr>
-          <p:cNvPr id="9" name="텍스트"/>
+          <p:cNvPr id="12" name="텍스트"/>
           <p:cNvSpPr txBox="1"/>
           <p:nvPr/>
         </p:nvSpPr>
         <p:spPr>
           <a:xfrm>
-            <a:off x="583200" y="1317600"/>
-            <a:ext cx="1188000" cy="125731"/>
+            <a:off x="576000" y="1173600"/>
+            <a:ext cx="972000" cy="120016"/>
           </a:xfrm>
           <a:prstGeom prst="rect">
             <a:avLst/>
@@ -3410,11 +3444,11 @@
           <a:p>
             <a:pPr algn="l">
               <a:lnSpc>
-                <a:spcPts val="956"/>
+                <a:spcPts val="913"/>
               </a:lnSpc>
             </a:pPr>
             <a:r>
-              <a:rPr sz="660" b="0">
+              <a:rPr sz="630" b="0">
                 <a:solidFill>
                   <a:srgbClr val="12151C"/>
                 </a:solidFill>
@@ -3428,14 +3462,14 @@
       </p:sp>
       <p:sp>
         <p:nvSpPr>
-          <p:cNvPr id="10" name="텍스트"/>
+          <p:cNvPr id="13" name="텍스트"/>
           <p:cNvSpPr txBox="1"/>
           <p:nvPr/>
         </p:nvSpPr>
         <p:spPr>
           <a:xfrm>
-            <a:off x="252000" y="1458000"/>
-            <a:ext cx="331200" cy="99061"/>
+            <a:off x="252000" y="1314000"/>
+            <a:ext cx="324000" cy="91441"/>
           </a:xfrm>
           <a:prstGeom prst="rect">
             <a:avLst/>
@@ -3450,11 +3484,11 @@
           <a:p>
             <a:pPr algn="l">
               <a:lnSpc>
-                <a:spcPts val="754"/>
+                <a:spcPts val="696"/>
               </a:lnSpc>
             </a:pPr>
             <a:r>
-              <a:rPr sz="520" b="1" spc="120">
+              <a:rPr sz="480" b="1" spc="140">
                 <a:solidFill>
                   <a:srgbClr val="36284E"/>
                 </a:solidFill>
@@ -3468,14 +3502,14 @@
       </p:sp>
       <p:sp>
         <p:nvSpPr>
-          <p:cNvPr id="11" name="텍스트"/>
+          <p:cNvPr id="14" name="텍스트"/>
           <p:cNvSpPr txBox="1"/>
           <p:nvPr/>
         </p:nvSpPr>
         <p:spPr>
           <a:xfrm>
-            <a:off x="583200" y="1447200"/>
-            <a:ext cx="1188000" cy="125731"/>
+            <a:off x="576000" y="1303200"/>
+            <a:ext cx="972000" cy="120016"/>
           </a:xfrm>
           <a:prstGeom prst="rect">
             <a:avLst/>
@@ -3490,11 +3524,11 @@
           <a:p>
             <a:pPr algn="l">
               <a:lnSpc>
-                <a:spcPts val="956"/>
+                <a:spcPts val="913"/>
               </a:lnSpc>
             </a:pPr>
             <a:r>
-              <a:rPr sz="660" b="0">
+              <a:rPr sz="630" b="0">
                 <a:solidFill>
                   <a:srgbClr val="12151C"/>
                 </a:solidFill>
@@ -3508,14 +3542,14 @@
       </p:sp>
       <p:sp>
         <p:nvSpPr>
-          <p:cNvPr id="12" name="텍스트"/>
+          <p:cNvPr id="15" name="텍스트"/>
           <p:cNvSpPr txBox="1"/>
           <p:nvPr/>
         </p:nvSpPr>
         <p:spPr>
           <a:xfrm>
-            <a:off x="252000" y="1587600"/>
-            <a:ext cx="331200" cy="99061"/>
+            <a:off x="252000" y="1443600"/>
+            <a:ext cx="324000" cy="91441"/>
           </a:xfrm>
           <a:prstGeom prst="rect">
             <a:avLst/>
@@ -3530,11 +3564,11 @@
           <a:p>
             <a:pPr algn="l">
               <a:lnSpc>
-                <a:spcPts val="754"/>
+                <a:spcPts val="696"/>
               </a:lnSpc>
             </a:pPr>
             <a:r>
-              <a:rPr sz="520" b="1" spc="120">
+              <a:rPr sz="480" b="1" spc="140">
                 <a:solidFill>
                   <a:srgbClr val="36284E"/>
                 </a:solidFill>
@@ -3548,14 +3582,14 @@
       </p:sp>
       <p:sp>
         <p:nvSpPr>
-          <p:cNvPr id="13" name="텍스트"/>
+          <p:cNvPr id="16" name="텍스트"/>
           <p:cNvSpPr txBox="1"/>
           <p:nvPr/>
         </p:nvSpPr>
         <p:spPr>
           <a:xfrm>
-            <a:off x="583200" y="1576800"/>
-            <a:ext cx="1188000" cy="125731"/>
+            <a:off x="576000" y="1432800"/>
+            <a:ext cx="972000" cy="120016"/>
           </a:xfrm>
           <a:prstGeom prst="rect">
             <a:avLst/>
@@ -3570,11 +3604,11 @@
           <a:p>
             <a:pPr algn="l">
               <a:lnSpc>
-                <a:spcPts val="956"/>
+                <a:spcPts val="913"/>
               </a:lnSpc>
             </a:pPr>
             <a:r>
-              <a:rPr sz="660" b="0">
+              <a:rPr sz="630" b="0">
                 <a:solidFill>
                   <a:srgbClr val="12151C"/>
                 </a:solidFill>
@@ -3620,8 +3654,8 @@
         </p:nvSpPr>
         <p:spPr>
           <a:xfrm>
-            <a:off x="2088000" y="0"/>
-            <a:ext cx="1152000" cy="1800000"/>
+            <a:off x="0" y="0"/>
+            <a:ext cx="1188000" cy="1800000"/>
           </a:xfrm>
           <a:prstGeom prst="rect">
             <a:avLst/>
@@ -3641,27 +3675,657 @@
           </a:p>
         </p:txBody>
       </p:sp>
-      <p:sp>
-        <p:nvSpPr>
-          <p:cNvPr id="3" name="Oval 2"/>
-          <p:cNvSpPr/>
-          <p:nvPr/>
-        </p:nvSpPr>
-        <p:spPr>
-          <a:xfrm>
-            <a:off x="2397600" y="633600"/>
-            <a:ext cx="532800" cy="532800"/>
-          </a:xfrm>
-          <a:prstGeom prst="ellipse">
-            <a:avLst/>
-          </a:prstGeom>
-          <a:noFill/>
-          <a:ln w="10800">
+      <p:cxnSp>
+        <p:nvCxnSpPr>
+          <p:cNvPr id="3" name="Connector 2"/>
+          <p:cNvCxnSpPr/>
+          <p:nvPr/>
+        </p:nvCxnSpPr>
+        <p:spPr>
+          <a:xfrm flipV="1">
+            <a:off x="0" y="1224000"/>
+            <a:ext cx="57600" cy="57600"/>
+          </a:xfrm>
+          <a:prstGeom prst="line">
+            <a:avLst/>
+          </a:prstGeom>
+          <a:ln w="3600">
             <a:solidFill>
               <a:srgbClr val="12151C"/>
             </a:solidFill>
           </a:ln>
         </p:spPr>
+      </p:cxnSp>
+      <p:cxnSp>
+        <p:nvCxnSpPr>
+          <p:cNvPr id="4" name="Connector 3"/>
+          <p:cNvCxnSpPr/>
+          <p:nvPr/>
+        </p:nvCxnSpPr>
+        <p:spPr>
+          <a:xfrm flipV="1">
+            <a:off x="0" y="1224000"/>
+            <a:ext cx="115200" cy="115200"/>
+          </a:xfrm>
+          <a:prstGeom prst="line">
+            <a:avLst/>
+          </a:prstGeom>
+          <a:ln w="3600">
+            <a:solidFill>
+              <a:srgbClr val="12151C"/>
+            </a:solidFill>
+          </a:ln>
+        </p:spPr>
+      </p:cxnSp>
+      <p:cxnSp>
+        <p:nvCxnSpPr>
+          <p:cNvPr id="5" name="Connector 4"/>
+          <p:cNvCxnSpPr/>
+          <p:nvPr/>
+        </p:nvCxnSpPr>
+        <p:spPr>
+          <a:xfrm flipV="1">
+            <a:off x="0" y="1224000"/>
+            <a:ext cx="172800" cy="172800"/>
+          </a:xfrm>
+          <a:prstGeom prst="line">
+            <a:avLst/>
+          </a:prstGeom>
+          <a:ln w="3600">
+            <a:solidFill>
+              <a:srgbClr val="12151C"/>
+            </a:solidFill>
+          </a:ln>
+        </p:spPr>
+      </p:cxnSp>
+      <p:cxnSp>
+        <p:nvCxnSpPr>
+          <p:cNvPr id="6" name="Connector 5"/>
+          <p:cNvCxnSpPr/>
+          <p:nvPr/>
+        </p:nvCxnSpPr>
+        <p:spPr>
+          <a:xfrm flipV="1">
+            <a:off x="0" y="1224000"/>
+            <a:ext cx="230400" cy="230400"/>
+          </a:xfrm>
+          <a:prstGeom prst="line">
+            <a:avLst/>
+          </a:prstGeom>
+          <a:ln w="3600">
+            <a:solidFill>
+              <a:srgbClr val="12151C"/>
+            </a:solidFill>
+          </a:ln>
+        </p:spPr>
+      </p:cxnSp>
+      <p:cxnSp>
+        <p:nvCxnSpPr>
+          <p:cNvPr id="7" name="Connector 6"/>
+          <p:cNvCxnSpPr/>
+          <p:nvPr/>
+        </p:nvCxnSpPr>
+        <p:spPr>
+          <a:xfrm flipV="1">
+            <a:off x="0" y="1224000"/>
+            <a:ext cx="288000" cy="288000"/>
+          </a:xfrm>
+          <a:prstGeom prst="line">
+            <a:avLst/>
+          </a:prstGeom>
+          <a:ln w="3600">
+            <a:solidFill>
+              <a:srgbClr val="12151C"/>
+            </a:solidFill>
+          </a:ln>
+        </p:spPr>
+      </p:cxnSp>
+      <p:cxnSp>
+        <p:nvCxnSpPr>
+          <p:cNvPr id="8" name="Connector 7"/>
+          <p:cNvCxnSpPr/>
+          <p:nvPr/>
+        </p:nvCxnSpPr>
+        <p:spPr>
+          <a:xfrm flipV="1">
+            <a:off x="0" y="1224000"/>
+            <a:ext cx="345600" cy="345600"/>
+          </a:xfrm>
+          <a:prstGeom prst="line">
+            <a:avLst/>
+          </a:prstGeom>
+          <a:ln w="3600">
+            <a:solidFill>
+              <a:srgbClr val="12151C"/>
+            </a:solidFill>
+          </a:ln>
+        </p:spPr>
+      </p:cxnSp>
+      <p:cxnSp>
+        <p:nvCxnSpPr>
+          <p:cNvPr id="9" name="Connector 8"/>
+          <p:cNvCxnSpPr/>
+          <p:nvPr/>
+        </p:nvCxnSpPr>
+        <p:spPr>
+          <a:xfrm flipV="1">
+            <a:off x="0" y="1224000"/>
+            <a:ext cx="403200" cy="403200"/>
+          </a:xfrm>
+          <a:prstGeom prst="line">
+            <a:avLst/>
+          </a:prstGeom>
+          <a:ln w="3600">
+            <a:solidFill>
+              <a:srgbClr val="12151C"/>
+            </a:solidFill>
+          </a:ln>
+        </p:spPr>
+      </p:cxnSp>
+      <p:cxnSp>
+        <p:nvCxnSpPr>
+          <p:cNvPr id="10" name="Connector 9"/>
+          <p:cNvCxnSpPr/>
+          <p:nvPr/>
+        </p:nvCxnSpPr>
+        <p:spPr>
+          <a:xfrm flipV="1">
+            <a:off x="0" y="1224000"/>
+            <a:ext cx="460800" cy="460800"/>
+          </a:xfrm>
+          <a:prstGeom prst="line">
+            <a:avLst/>
+          </a:prstGeom>
+          <a:ln w="3600">
+            <a:solidFill>
+              <a:srgbClr val="12151C"/>
+            </a:solidFill>
+          </a:ln>
+        </p:spPr>
+      </p:cxnSp>
+      <p:cxnSp>
+        <p:nvCxnSpPr>
+          <p:cNvPr id="11" name="Connector 10"/>
+          <p:cNvCxnSpPr/>
+          <p:nvPr/>
+        </p:nvCxnSpPr>
+        <p:spPr>
+          <a:xfrm flipV="1">
+            <a:off x="0" y="1224000"/>
+            <a:ext cx="518400" cy="518400"/>
+          </a:xfrm>
+          <a:prstGeom prst="line">
+            <a:avLst/>
+          </a:prstGeom>
+          <a:ln w="3600">
+            <a:solidFill>
+              <a:srgbClr val="12151C"/>
+            </a:solidFill>
+          </a:ln>
+        </p:spPr>
+      </p:cxnSp>
+      <p:cxnSp>
+        <p:nvCxnSpPr>
+          <p:cNvPr id="12" name="Connector 11"/>
+          <p:cNvCxnSpPr/>
+          <p:nvPr/>
+        </p:nvCxnSpPr>
+        <p:spPr>
+          <a:xfrm flipV="1">
+            <a:off x="0" y="1224000"/>
+            <a:ext cx="576000" cy="576000"/>
+          </a:xfrm>
+          <a:prstGeom prst="line">
+            <a:avLst/>
+          </a:prstGeom>
+          <a:ln w="3600">
+            <a:solidFill>
+              <a:srgbClr val="12151C"/>
+            </a:solidFill>
+          </a:ln>
+        </p:spPr>
+      </p:cxnSp>
+      <p:cxnSp>
+        <p:nvCxnSpPr>
+          <p:cNvPr id="13" name="Connector 12"/>
+          <p:cNvCxnSpPr/>
+          <p:nvPr/>
+        </p:nvCxnSpPr>
+        <p:spPr>
+          <a:xfrm flipV="1">
+            <a:off x="57600" y="1224000"/>
+            <a:ext cx="576000" cy="576000"/>
+          </a:xfrm>
+          <a:prstGeom prst="line">
+            <a:avLst/>
+          </a:prstGeom>
+          <a:ln w="3600">
+            <a:solidFill>
+              <a:srgbClr val="12151C"/>
+            </a:solidFill>
+          </a:ln>
+        </p:spPr>
+      </p:cxnSp>
+      <p:cxnSp>
+        <p:nvCxnSpPr>
+          <p:cNvPr id="14" name="Connector 13"/>
+          <p:cNvCxnSpPr/>
+          <p:nvPr/>
+        </p:nvCxnSpPr>
+        <p:spPr>
+          <a:xfrm flipV="1">
+            <a:off x="115200" y="1224000"/>
+            <a:ext cx="576000" cy="576000"/>
+          </a:xfrm>
+          <a:prstGeom prst="line">
+            <a:avLst/>
+          </a:prstGeom>
+          <a:ln w="3600">
+            <a:solidFill>
+              <a:srgbClr val="12151C"/>
+            </a:solidFill>
+          </a:ln>
+        </p:spPr>
+      </p:cxnSp>
+      <p:cxnSp>
+        <p:nvCxnSpPr>
+          <p:cNvPr id="15" name="Connector 14"/>
+          <p:cNvCxnSpPr/>
+          <p:nvPr/>
+        </p:nvCxnSpPr>
+        <p:spPr>
+          <a:xfrm flipV="1">
+            <a:off x="172800" y="1224000"/>
+            <a:ext cx="576000" cy="576000"/>
+          </a:xfrm>
+          <a:prstGeom prst="line">
+            <a:avLst/>
+          </a:prstGeom>
+          <a:ln w="3600">
+            <a:solidFill>
+              <a:srgbClr val="12151C"/>
+            </a:solidFill>
+          </a:ln>
+        </p:spPr>
+      </p:cxnSp>
+      <p:cxnSp>
+        <p:nvCxnSpPr>
+          <p:cNvPr id="16" name="Connector 15"/>
+          <p:cNvCxnSpPr/>
+          <p:nvPr/>
+        </p:nvCxnSpPr>
+        <p:spPr>
+          <a:xfrm flipV="1">
+            <a:off x="230400" y="1224000"/>
+            <a:ext cx="576000" cy="576000"/>
+          </a:xfrm>
+          <a:prstGeom prst="line">
+            <a:avLst/>
+          </a:prstGeom>
+          <a:ln w="3600">
+            <a:solidFill>
+              <a:srgbClr val="12151C"/>
+            </a:solidFill>
+          </a:ln>
+        </p:spPr>
+      </p:cxnSp>
+      <p:cxnSp>
+        <p:nvCxnSpPr>
+          <p:cNvPr id="17" name="Connector 16"/>
+          <p:cNvCxnSpPr/>
+          <p:nvPr/>
+        </p:nvCxnSpPr>
+        <p:spPr>
+          <a:xfrm flipV="1">
+            <a:off x="288000" y="1224000"/>
+            <a:ext cx="576000" cy="576000"/>
+          </a:xfrm>
+          <a:prstGeom prst="line">
+            <a:avLst/>
+          </a:prstGeom>
+          <a:ln w="3600">
+            <a:solidFill>
+              <a:srgbClr val="12151C"/>
+            </a:solidFill>
+          </a:ln>
+        </p:spPr>
+      </p:cxnSp>
+      <p:cxnSp>
+        <p:nvCxnSpPr>
+          <p:cNvPr id="18" name="Connector 17"/>
+          <p:cNvCxnSpPr/>
+          <p:nvPr/>
+        </p:nvCxnSpPr>
+        <p:spPr>
+          <a:xfrm flipV="1">
+            <a:off x="345600" y="1224000"/>
+            <a:ext cx="576000" cy="576000"/>
+          </a:xfrm>
+          <a:prstGeom prst="line">
+            <a:avLst/>
+          </a:prstGeom>
+          <a:ln w="3600">
+            <a:solidFill>
+              <a:srgbClr val="12151C"/>
+            </a:solidFill>
+          </a:ln>
+        </p:spPr>
+      </p:cxnSp>
+      <p:cxnSp>
+        <p:nvCxnSpPr>
+          <p:cNvPr id="19" name="Connector 18"/>
+          <p:cNvCxnSpPr/>
+          <p:nvPr/>
+        </p:nvCxnSpPr>
+        <p:spPr>
+          <a:xfrm flipV="1">
+            <a:off x="403200" y="1224000"/>
+            <a:ext cx="576000" cy="576000"/>
+          </a:xfrm>
+          <a:prstGeom prst="line">
+            <a:avLst/>
+          </a:prstGeom>
+          <a:ln w="3600">
+            <a:solidFill>
+              <a:srgbClr val="12151C"/>
+            </a:solidFill>
+          </a:ln>
+        </p:spPr>
+      </p:cxnSp>
+      <p:cxnSp>
+        <p:nvCxnSpPr>
+          <p:cNvPr id="20" name="Connector 19"/>
+          <p:cNvCxnSpPr/>
+          <p:nvPr/>
+        </p:nvCxnSpPr>
+        <p:spPr>
+          <a:xfrm flipV="1">
+            <a:off x="460800" y="1224000"/>
+            <a:ext cx="576000" cy="576000"/>
+          </a:xfrm>
+          <a:prstGeom prst="line">
+            <a:avLst/>
+          </a:prstGeom>
+          <a:ln w="3600">
+            <a:solidFill>
+              <a:srgbClr val="12151C"/>
+            </a:solidFill>
+          </a:ln>
+        </p:spPr>
+      </p:cxnSp>
+      <p:cxnSp>
+        <p:nvCxnSpPr>
+          <p:cNvPr id="21" name="Connector 20"/>
+          <p:cNvCxnSpPr/>
+          <p:nvPr/>
+        </p:nvCxnSpPr>
+        <p:spPr>
+          <a:xfrm flipV="1">
+            <a:off x="518400" y="1224000"/>
+            <a:ext cx="576000" cy="576000"/>
+          </a:xfrm>
+          <a:prstGeom prst="line">
+            <a:avLst/>
+          </a:prstGeom>
+          <a:ln w="3600">
+            <a:solidFill>
+              <a:srgbClr val="12151C"/>
+            </a:solidFill>
+          </a:ln>
+        </p:spPr>
+      </p:cxnSp>
+      <p:cxnSp>
+        <p:nvCxnSpPr>
+          <p:cNvPr id="22" name="Connector 21"/>
+          <p:cNvCxnSpPr/>
+          <p:nvPr/>
+        </p:nvCxnSpPr>
+        <p:spPr>
+          <a:xfrm flipV="1">
+            <a:off x="576000" y="1224000"/>
+            <a:ext cx="576000" cy="576000"/>
+          </a:xfrm>
+          <a:prstGeom prst="line">
+            <a:avLst/>
+          </a:prstGeom>
+          <a:ln w="3600">
+            <a:solidFill>
+              <a:srgbClr val="12151C"/>
+            </a:solidFill>
+          </a:ln>
+        </p:spPr>
+      </p:cxnSp>
+      <p:cxnSp>
+        <p:nvCxnSpPr>
+          <p:cNvPr id="23" name="Connector 22"/>
+          <p:cNvCxnSpPr/>
+          <p:nvPr/>
+        </p:nvCxnSpPr>
+        <p:spPr>
+          <a:xfrm flipV="1">
+            <a:off x="633600" y="1245600"/>
+            <a:ext cx="554400" cy="554400"/>
+          </a:xfrm>
+          <a:prstGeom prst="line">
+            <a:avLst/>
+          </a:prstGeom>
+          <a:ln w="3600">
+            <a:solidFill>
+              <a:srgbClr val="12151C"/>
+            </a:solidFill>
+          </a:ln>
+        </p:spPr>
+      </p:cxnSp>
+      <p:cxnSp>
+        <p:nvCxnSpPr>
+          <p:cNvPr id="24" name="Connector 23"/>
+          <p:cNvCxnSpPr/>
+          <p:nvPr/>
+        </p:nvCxnSpPr>
+        <p:spPr>
+          <a:xfrm flipV="1">
+            <a:off x="691200" y="1303200"/>
+            <a:ext cx="496800" cy="496800"/>
+          </a:xfrm>
+          <a:prstGeom prst="line">
+            <a:avLst/>
+          </a:prstGeom>
+          <a:ln w="3600">
+            <a:solidFill>
+              <a:srgbClr val="12151C"/>
+            </a:solidFill>
+          </a:ln>
+        </p:spPr>
+      </p:cxnSp>
+      <p:cxnSp>
+        <p:nvCxnSpPr>
+          <p:cNvPr id="25" name="Connector 24"/>
+          <p:cNvCxnSpPr/>
+          <p:nvPr/>
+        </p:nvCxnSpPr>
+        <p:spPr>
+          <a:xfrm flipV="1">
+            <a:off x="748800" y="1360800"/>
+            <a:ext cx="439200" cy="439200"/>
+          </a:xfrm>
+          <a:prstGeom prst="line">
+            <a:avLst/>
+          </a:prstGeom>
+          <a:ln w="3600">
+            <a:solidFill>
+              <a:srgbClr val="12151C"/>
+            </a:solidFill>
+          </a:ln>
+        </p:spPr>
+      </p:cxnSp>
+      <p:cxnSp>
+        <p:nvCxnSpPr>
+          <p:cNvPr id="26" name="Connector 25"/>
+          <p:cNvCxnSpPr/>
+          <p:nvPr/>
+        </p:nvCxnSpPr>
+        <p:spPr>
+          <a:xfrm flipV="1">
+            <a:off x="806400" y="1418400"/>
+            <a:ext cx="381600" cy="381600"/>
+          </a:xfrm>
+          <a:prstGeom prst="line">
+            <a:avLst/>
+          </a:prstGeom>
+          <a:ln w="3600">
+            <a:solidFill>
+              <a:srgbClr val="12151C"/>
+            </a:solidFill>
+          </a:ln>
+        </p:spPr>
+      </p:cxnSp>
+      <p:cxnSp>
+        <p:nvCxnSpPr>
+          <p:cNvPr id="27" name="Connector 26"/>
+          <p:cNvCxnSpPr/>
+          <p:nvPr/>
+        </p:nvCxnSpPr>
+        <p:spPr>
+          <a:xfrm flipV="1">
+            <a:off x="864000" y="1476000"/>
+            <a:ext cx="324000" cy="324000"/>
+          </a:xfrm>
+          <a:prstGeom prst="line">
+            <a:avLst/>
+          </a:prstGeom>
+          <a:ln w="3600">
+            <a:solidFill>
+              <a:srgbClr val="12151C"/>
+            </a:solidFill>
+          </a:ln>
+        </p:spPr>
+      </p:cxnSp>
+      <p:cxnSp>
+        <p:nvCxnSpPr>
+          <p:cNvPr id="28" name="Connector 27"/>
+          <p:cNvCxnSpPr/>
+          <p:nvPr/>
+        </p:nvCxnSpPr>
+        <p:spPr>
+          <a:xfrm flipV="1">
+            <a:off x="921600" y="1533600"/>
+            <a:ext cx="266400" cy="266400"/>
+          </a:xfrm>
+          <a:prstGeom prst="line">
+            <a:avLst/>
+          </a:prstGeom>
+          <a:ln w="3600">
+            <a:solidFill>
+              <a:srgbClr val="12151C"/>
+            </a:solidFill>
+          </a:ln>
+        </p:spPr>
+      </p:cxnSp>
+      <p:cxnSp>
+        <p:nvCxnSpPr>
+          <p:cNvPr id="29" name="Connector 28"/>
+          <p:cNvCxnSpPr/>
+          <p:nvPr/>
+        </p:nvCxnSpPr>
+        <p:spPr>
+          <a:xfrm flipV="1">
+            <a:off x="979200" y="1591200"/>
+            <a:ext cx="208800" cy="208800"/>
+          </a:xfrm>
+          <a:prstGeom prst="line">
+            <a:avLst/>
+          </a:prstGeom>
+          <a:ln w="3600">
+            <a:solidFill>
+              <a:srgbClr val="12151C"/>
+            </a:solidFill>
+          </a:ln>
+        </p:spPr>
+      </p:cxnSp>
+      <p:cxnSp>
+        <p:nvCxnSpPr>
+          <p:cNvPr id="30" name="Connector 29"/>
+          <p:cNvCxnSpPr/>
+          <p:nvPr/>
+        </p:nvCxnSpPr>
+        <p:spPr>
+          <a:xfrm flipV="1">
+            <a:off x="1036800" y="1648800"/>
+            <a:ext cx="151200" cy="151200"/>
+          </a:xfrm>
+          <a:prstGeom prst="line">
+            <a:avLst/>
+          </a:prstGeom>
+          <a:ln w="3600">
+            <a:solidFill>
+              <a:srgbClr val="12151C"/>
+            </a:solidFill>
+          </a:ln>
+        </p:spPr>
+      </p:cxnSp>
+      <p:cxnSp>
+        <p:nvCxnSpPr>
+          <p:cNvPr id="31" name="Connector 30"/>
+          <p:cNvCxnSpPr/>
+          <p:nvPr/>
+        </p:nvCxnSpPr>
+        <p:spPr>
+          <a:xfrm flipV="1">
+            <a:off x="1094400" y="1706400"/>
+            <a:ext cx="93600" cy="93600"/>
+          </a:xfrm>
+          <a:prstGeom prst="line">
+            <a:avLst/>
+          </a:prstGeom>
+          <a:ln w="3600">
+            <a:solidFill>
+              <a:srgbClr val="12151C"/>
+            </a:solidFill>
+          </a:ln>
+        </p:spPr>
+      </p:cxnSp>
+      <p:cxnSp>
+        <p:nvCxnSpPr>
+          <p:cNvPr id="32" name="Connector 31"/>
+          <p:cNvCxnSpPr/>
+          <p:nvPr/>
+        </p:nvCxnSpPr>
+        <p:spPr>
+          <a:xfrm flipV="1">
+            <a:off x="1152000" y="1764000"/>
+            <a:ext cx="36000" cy="36000"/>
+          </a:xfrm>
+          <a:prstGeom prst="line">
+            <a:avLst/>
+          </a:prstGeom>
+          <a:ln w="3600">
+            <a:solidFill>
+              <a:srgbClr val="12151C"/>
+            </a:solidFill>
+          </a:ln>
+        </p:spPr>
+      </p:cxnSp>
+      <p:sp>
+        <p:nvSpPr>
+          <p:cNvPr id="33" name="Oval 32"/>
+          <p:cNvSpPr/>
+          <p:nvPr/>
+        </p:nvSpPr>
+        <p:spPr>
+          <a:xfrm>
+            <a:off x="216000" y="252000"/>
+            <a:ext cx="288000" cy="288000"/>
+          </a:xfrm>
+          <a:prstGeom prst="ellipse">
+            <a:avLst/>
+          </a:prstGeom>
+          <a:noFill/>
+          <a:ln w="5760">
+            <a:solidFill>
+              <a:srgbClr val="12151C"/>
+            </a:solidFill>
+          </a:ln>
+        </p:spPr>
         <p:txBody>
           <a:bodyPr rtlCol="0" anchor="ctr"/>
           <a:lstStyle/>
@@ -3672,14 +4336,14 @@
       </p:sp>
       <p:sp>
         <p:nvSpPr>
-          <p:cNvPr id="4" name="텍스트"/>
+          <p:cNvPr id="34" name="텍스트"/>
           <p:cNvSpPr txBox="1"/>
           <p:nvPr/>
         </p:nvSpPr>
         <p:spPr>
           <a:xfrm>
-            <a:off x="2304000" y="684000"/>
-            <a:ext cx="720000" cy="432000"/>
+            <a:off x="216000" y="252000"/>
+            <a:ext cx="288000" cy="288000"/>
           </a:xfrm>
           <a:prstGeom prst="rect">
             <a:avLst/>
@@ -3694,11 +4358,11 @@
           <a:p>
             <a:pPr algn="ctr">
               <a:lnSpc>
-                <a:spcPts val="4350"/>
+                <a:spcPts val="2030"/>
               </a:lnSpc>
             </a:pPr>
             <a:r>
-              <a:rPr sz="3000" b="1">
+              <a:rPr sz="1400" b="1">
                 <a:solidFill>
                   <a:srgbClr val="12151C"/>
                 </a:solidFill>
@@ -3712,14 +4376,14 @@
       </p:sp>
       <p:sp>
         <p:nvSpPr>
-          <p:cNvPr id="5" name="텍스트"/>
+          <p:cNvPr id="35" name="텍스트"/>
           <p:cNvSpPr txBox="1"/>
           <p:nvPr/>
         </p:nvSpPr>
         <p:spPr>
           <a:xfrm>
-            <a:off x="252000" y="540000"/>
-            <a:ext cx="1620000" cy="720000"/>
+            <a:off x="216000" y="1440000"/>
+            <a:ext cx="828000" cy="142876"/>
           </a:xfrm>
           <a:prstGeom prst="rect">
             <a:avLst/>
@@ -3734,49 +4398,154 @@
           <a:p>
             <a:pPr algn="l">
               <a:lnSpc>
-                <a:spcPts val="1739"/>
+                <a:spcPts val="1087"/>
               </a:lnSpc>
             </a:pPr>
             <a:r>
-              <a:rPr sz="1200" b="1">
+              <a:rPr sz="750" b="1" spc="100">
                 <a:solidFill>
                   <a:srgbClr val="12151C"/>
                 </a:solidFill>
                 <a:latin typeface="맑은 고딕"/>
                 <a:ea typeface="맑은 고딕"/>
               </a:rPr>
-              <a:t>어려운 용어는</a:t>
-            </a:r>
-          </a:p>
+              <a:t>상담 분야</a:t>
+            </a:r>
+          </a:p>
+        </p:txBody>
+      </p:sp>
+      <p:sp>
+        <p:nvSpPr>
+          <p:cNvPr id="36" name="텍스트"/>
+          <p:cNvSpPr txBox="1"/>
+          <p:nvPr/>
+        </p:nvSpPr>
+        <p:spPr>
+          <a:xfrm>
+            <a:off x="1440000" y="223200"/>
+            <a:ext cx="1080000" cy="99061"/>
+          </a:xfrm>
+          <a:prstGeom prst="rect">
+            <a:avLst/>
+          </a:prstGeom>
+          <a:noFill/>
+        </p:spPr>
+        <p:txBody>
+          <a:bodyPr wrap="square" lIns="0" rIns="0" tIns="0" bIns="0" anchor="t">
+            <a:spAutoFit/>
+          </a:bodyPr>
+          <a:lstStyle/>
           <a:p>
             <a:pPr algn="l">
               <a:lnSpc>
-                <a:spcPts val="1739"/>
+                <a:spcPts val="754"/>
               </a:lnSpc>
             </a:pPr>
             <a:r>
-              <a:rPr sz="1200" b="1">
+              <a:rPr sz="520" b="1" spc="240">
+                <a:solidFill>
+                  <a:srgbClr val="6B7280"/>
+                </a:solidFill>
+                <a:latin typeface="맑은 고딕"/>
+                <a:ea typeface="맑은 고딕"/>
+              </a:rPr>
+              <a:t>상담 분야</a:t>
+            </a:r>
+          </a:p>
+        </p:txBody>
+      </p:sp>
+      <p:cxnSp>
+        <p:nvCxnSpPr>
+          <p:cNvPr id="37" name="Connector 36"/>
+          <p:cNvCxnSpPr/>
+          <p:nvPr/>
+        </p:nvCxnSpPr>
+        <p:spPr>
+          <a:xfrm>
+            <a:off x="1440000" y="360000"/>
+            <a:ext cx="1548000" cy="0"/>
+          </a:xfrm>
+          <a:prstGeom prst="line">
+            <a:avLst/>
+          </a:prstGeom>
+          <a:ln w="3600">
+            <a:solidFill>
+              <a:srgbClr val="DCDFE4"/>
+            </a:solidFill>
+          </a:ln>
+        </p:spPr>
+      </p:cxnSp>
+      <p:sp>
+        <p:nvSpPr>
+          <p:cNvPr id="38" name="텍스트"/>
+          <p:cNvSpPr txBox="1"/>
+          <p:nvPr/>
+        </p:nvSpPr>
+        <p:spPr>
+          <a:xfrm>
+            <a:off x="1440000" y="403200"/>
+            <a:ext cx="1296000" cy="133351"/>
+          </a:xfrm>
+          <a:prstGeom prst="rect">
+            <a:avLst/>
+          </a:prstGeom>
+          <a:noFill/>
+        </p:spPr>
+        <p:txBody>
+          <a:bodyPr wrap="square" lIns="0" rIns="0" tIns="0" bIns="0" anchor="t">
+            <a:spAutoFit/>
+          </a:bodyPr>
+          <a:lstStyle/>
+          <a:p>
+            <a:pPr algn="l">
+              <a:lnSpc>
+                <a:spcPts val="1015"/>
+              </a:lnSpc>
+            </a:pPr>
+            <a:r>
+              <a:rPr sz="700" b="0">
                 <a:solidFill>
                   <a:srgbClr val="12151C"/>
                 </a:solidFill>
                 <a:latin typeface="맑은 고딕"/>
                 <a:ea typeface="맑은 고딕"/>
               </a:rPr>
-              <a:t>쉽게 풀어서</a:t>
-            </a:r>
-          </a:p>
-        </p:txBody>
-      </p:sp>
-      <p:sp>
-        <p:nvSpPr>
-          <p:cNvPr id="6" name="텍스트"/>
+              <a:t>자산 관리</a:t>
+            </a:r>
+          </a:p>
+        </p:txBody>
+      </p:sp>
+      <p:cxnSp>
+        <p:nvCxnSpPr>
+          <p:cNvPr id="39" name="Connector 38"/>
+          <p:cNvCxnSpPr/>
+          <p:nvPr/>
+        </p:nvCxnSpPr>
+        <p:spPr>
+          <a:xfrm>
+            <a:off x="1440000" y="561600"/>
+            <a:ext cx="1548000" cy="0"/>
+          </a:xfrm>
+          <a:prstGeom prst="line">
+            <a:avLst/>
+          </a:prstGeom>
+          <a:ln w="3600">
+            <a:solidFill>
+              <a:srgbClr val="DCDFE4"/>
+            </a:solidFill>
+          </a:ln>
+        </p:spPr>
+      </p:cxnSp>
+      <p:sp>
+        <p:nvSpPr>
+          <p:cNvPr id="40" name="텍스트"/>
           <p:cNvSpPr txBox="1"/>
           <p:nvPr/>
         </p:nvSpPr>
         <p:spPr>
           <a:xfrm>
-            <a:off x="252000" y="1512000"/>
-            <a:ext cx="1584000" cy="123826"/>
+            <a:off x="1440000" y="604800"/>
+            <a:ext cx="1296000" cy="133351"/>
           </a:xfrm>
           <a:prstGeom prst="rect">
             <a:avLst/>
@@ -3791,18 +4560,201 @@
           <a:p>
             <a:pPr algn="l">
               <a:lnSpc>
-                <a:spcPts val="942"/>
+                <a:spcPts val="1015"/>
               </a:lnSpc>
             </a:pPr>
             <a:r>
-              <a:rPr sz="650" b="1" spc="200">
+              <a:rPr sz="700" b="0">
+                <a:solidFill>
+                  <a:srgbClr val="12151C"/>
+                </a:solidFill>
+                <a:latin typeface="맑은 고딕"/>
+                <a:ea typeface="맑은 고딕"/>
+              </a:rPr>
+              <a:t>세무 상담</a:t>
+            </a:r>
+          </a:p>
+        </p:txBody>
+      </p:sp>
+      <p:cxnSp>
+        <p:nvCxnSpPr>
+          <p:cNvPr id="41" name="Connector 40"/>
+          <p:cNvCxnSpPr/>
+          <p:nvPr/>
+        </p:nvCxnSpPr>
+        <p:spPr>
+          <a:xfrm>
+            <a:off x="1440000" y="763200"/>
+            <a:ext cx="1548000" cy="0"/>
+          </a:xfrm>
+          <a:prstGeom prst="line">
+            <a:avLst/>
+          </a:prstGeom>
+          <a:ln w="3600">
+            <a:solidFill>
+              <a:srgbClr val="DCDFE4"/>
+            </a:solidFill>
+          </a:ln>
+        </p:spPr>
+      </p:cxnSp>
+      <p:sp>
+        <p:nvSpPr>
+          <p:cNvPr id="42" name="텍스트"/>
+          <p:cNvSpPr txBox="1"/>
+          <p:nvPr/>
+        </p:nvSpPr>
+        <p:spPr>
+          <a:xfrm>
+            <a:off x="1440000" y="806400"/>
+            <a:ext cx="1296000" cy="133351"/>
+          </a:xfrm>
+          <a:prstGeom prst="rect">
+            <a:avLst/>
+          </a:prstGeom>
+          <a:noFill/>
+        </p:spPr>
+        <p:txBody>
+          <a:bodyPr wrap="square" lIns="0" rIns="0" tIns="0" bIns="0" anchor="t">
+            <a:spAutoFit/>
+          </a:bodyPr>
+          <a:lstStyle/>
+          <a:p>
+            <a:pPr algn="l">
+              <a:lnSpc>
+                <a:spcPts val="1015"/>
+              </a:lnSpc>
+            </a:pPr>
+            <a:r>
+              <a:rPr sz="700" b="0">
+                <a:solidFill>
+                  <a:srgbClr val="12151C"/>
+                </a:solidFill>
+                <a:latin typeface="맑은 고딕"/>
+                <a:ea typeface="맑은 고딕"/>
+              </a:rPr>
+              <a:t>전세 상담</a:t>
+            </a:r>
+          </a:p>
+        </p:txBody>
+      </p:sp>
+      <p:cxnSp>
+        <p:nvCxnSpPr>
+          <p:cNvPr id="43" name="Connector 42"/>
+          <p:cNvCxnSpPr/>
+          <p:nvPr/>
+        </p:nvCxnSpPr>
+        <p:spPr>
+          <a:xfrm>
+            <a:off x="1440000" y="964800"/>
+            <a:ext cx="1548000" cy="0"/>
+          </a:xfrm>
+          <a:prstGeom prst="line">
+            <a:avLst/>
+          </a:prstGeom>
+          <a:ln w="3600">
+            <a:solidFill>
+              <a:srgbClr val="DCDFE4"/>
+            </a:solidFill>
+          </a:ln>
+        </p:spPr>
+      </p:cxnSp>
+      <p:sp>
+        <p:nvSpPr>
+          <p:cNvPr id="44" name="텍스트"/>
+          <p:cNvSpPr txBox="1"/>
+          <p:nvPr/>
+        </p:nvSpPr>
+        <p:spPr>
+          <a:xfrm>
+            <a:off x="1440000" y="1008000"/>
+            <a:ext cx="1296000" cy="133351"/>
+          </a:xfrm>
+          <a:prstGeom prst="rect">
+            <a:avLst/>
+          </a:prstGeom>
+          <a:noFill/>
+        </p:spPr>
+        <p:txBody>
+          <a:bodyPr wrap="square" lIns="0" rIns="0" tIns="0" bIns="0" anchor="t">
+            <a:spAutoFit/>
+          </a:bodyPr>
+          <a:lstStyle/>
+          <a:p>
+            <a:pPr algn="l">
+              <a:lnSpc>
+                <a:spcPts val="1015"/>
+              </a:lnSpc>
+            </a:pPr>
+            <a:r>
+              <a:rPr sz="700" b="0">
+                <a:solidFill>
+                  <a:srgbClr val="12151C"/>
+                </a:solidFill>
+                <a:latin typeface="맑은 고딕"/>
+                <a:ea typeface="맑은 고딕"/>
+              </a:rPr>
+              <a:t>투자 상담</a:t>
+            </a:r>
+          </a:p>
+        </p:txBody>
+      </p:sp>
+      <p:cxnSp>
+        <p:nvCxnSpPr>
+          <p:cNvPr id="45" name="Connector 44"/>
+          <p:cNvCxnSpPr/>
+          <p:nvPr/>
+        </p:nvCxnSpPr>
+        <p:spPr>
+          <a:xfrm>
+            <a:off x="1440000" y="1166400"/>
+            <a:ext cx="1548000" cy="0"/>
+          </a:xfrm>
+          <a:prstGeom prst="line">
+            <a:avLst/>
+          </a:prstGeom>
+          <a:ln w="3600">
+            <a:solidFill>
+              <a:srgbClr val="DCDFE4"/>
+            </a:solidFill>
+          </a:ln>
+        </p:spPr>
+      </p:cxnSp>
+      <p:sp>
+        <p:nvSpPr>
+          <p:cNvPr id="46" name="텍스트"/>
+          <p:cNvSpPr txBox="1"/>
+          <p:nvPr/>
+        </p:nvSpPr>
+        <p:spPr>
+          <a:xfrm>
+            <a:off x="1440000" y="1569600"/>
+            <a:ext cx="1548000" cy="114301"/>
+          </a:xfrm>
+          <a:prstGeom prst="rect">
+            <a:avLst/>
+          </a:prstGeom>
+          <a:noFill/>
+        </p:spPr>
+        <p:txBody>
+          <a:bodyPr wrap="square" lIns="0" rIns="0" tIns="0" bIns="0" anchor="t">
+            <a:spAutoFit/>
+          </a:bodyPr>
+          <a:lstStyle/>
+          <a:p>
+            <a:pPr algn="l">
+              <a:lnSpc>
+                <a:spcPts val="869"/>
+              </a:lnSpc>
+            </a:pPr>
+            <a:r>
+              <a:rPr sz="600" b="0">
                 <a:solidFill>
                   <a:srgbClr val="6B7280"/>
                 </a:solidFill>
                 <a:latin typeface="맑은 고딕"/>
                 <a:ea typeface="맑은 고딕"/>
               </a:rPr>
-              <a:t>회사 · 사무소 이름</a:t>
+              <a:t>평일 10:00 – 19:00   |   @채널아이디</a:t>
             </a:r>
           </a:p>
         </p:txBody>
